--- a/presentation/unit-3/CLMS-Unit-3-Testing-Quality-and-DevOps.pptx
+++ b/presentation/unit-3/CLMS-Unit-3-Testing-Quality-and-DevOps.pptx
@@ -3511,7 +3511,7 @@
                 <a:latin typeface="Helvetica"/>
                 <a:ea typeface="Helvetica"/>
               </a:rPr>
-              <a:t>121 tests, 82% coverage and two Selenium journeys — the evidence behind v1.0.0.</a:t>
+              <a:t>123 tests, 82% coverage and two Selenium journeys — the evidence behind v1.0.0.</a:t>
             </a:r>
           </a:p>
         </p:txBody>
@@ -5402,7 +5402,7 @@
                 <a:latin typeface="Georgia"/>
                 <a:ea typeface="Georgia"/>
               </a:rPr>
-              <a:t>121</a:t>
+              <a:t>123</a:t>
             </a:r>
           </a:p>
         </p:txBody>
@@ -5918,7 +5918,7 @@
                 <a:latin typeface="Georgia"/>
                 <a:ea typeface="Georgia"/>
               </a:rPr>
-              <a:t>2.13</a:t>
+              <a:t>2.15</a:t>
             </a:r>
           </a:p>
         </p:txBody>
@@ -6243,7 +6243,7 @@
                 <a:latin typeface="Helvetica"/>
                 <a:ea typeface="Helvetica"/>
               </a:rPr>
-              <a:t>Average CC 2.13</a:t>
+              <a:t>Average CC 2.15</a:t>
             </a:r>
           </a:p>
         </p:txBody>
@@ -6608,7 +6608,7 @@
                 <a:latin typeface="Helvetica"/>
                 <a:ea typeface="Helvetica"/>
               </a:rPr>
-              <a:t>Low average complexity is what let a two-person team hold 1,498 LOC and 314 functions in their heads.</a:t>
+              <a:t>Low average complexity is what let a two-person team hold 1,585 LOC and 321 functions in their heads.</a:t>
             </a:r>
           </a:p>
         </p:txBody>
@@ -7035,7 +7035,7 @@
                           <a:latin typeface="Helvetica"/>
                           <a:ea typeface="Helvetica"/>
                         </a:rPr>
-                        <a:t>121 tests · 6 suites · all passing</a:t>
+                        <a:t>123 tests · 6 suites · all passing</a:t>
                       </a:r>
                     </a:p>
                   </a:txBody>
@@ -7311,7 +7311,7 @@
                           <a:latin typeface="Helvetica"/>
                           <a:ea typeface="Helvetica"/>
                         </a:rPr>
-                        <a:t>layering · avg CC 2.13 · coverage floor</a:t>
+                        <a:t>layering · avg CC 2.15 · coverage floor</a:t>
                       </a:r>
                     </a:p>
                   </a:txBody>
@@ -11530,7 +11530,7 @@
                 <a:latin typeface="Helvetica"/>
                 <a:ea typeface="Helvetica"/>
               </a:rPr>
-              <a:t>: 121 tests green · 82.0% stmts / 88.1% lines · 2 E2E journeys passing</a:t>
+              <a:t>: 123 tests green · 82.4% stmts / 88.8% lines · 2 E2E journeys passing</a:t>
             </a:r>
           </a:p>
         </p:txBody>
@@ -14093,7 +14093,7 @@
                 <a:latin typeface="Georgia"/>
                 <a:ea typeface="Georgia"/>
               </a:rPr>
-              <a:t>A pyramid, not a coin flip: 121 tests in six suites</a:t>
+              <a:t>A pyramid, not a coin flip: 123 tests in six suites</a:t>
             </a:r>
           </a:p>
         </p:txBody>
@@ -14242,7 +14242,7 @@
                 <a:latin typeface="Georgia"/>
                 <a:ea typeface="Georgia"/>
               </a:rPr>
-              <a:t>121</a:t>
+              <a:t>123</a:t>
             </a:r>
           </a:p>
         </p:txBody>

--- a/presentation/unit-3/CLMS-Unit-3-Testing-Quality-and-DevOps.pptx
+++ b/presentation/unit-3/CLMS-Unit-3-Testing-Quality-and-DevOps.pptx
@@ -5652,7 +5652,7 @@
                 <a:latin typeface="Helvetica"/>
                 <a:ea typeface="Helvetica"/>
               </a:rPr>
-              <a:t>CLMS · 24CSI015 · Software Engineering with Agile Practices</a:t>
+              <a:t>KCT Library · 24CSI015 · Software Engineering with Agile Practices</a:t>
             </a:r>
           </a:p>
         </p:txBody>
@@ -6693,7 +6693,7 @@
                 <a:latin typeface="Helvetica"/>
                 <a:ea typeface="Helvetica"/>
               </a:rPr>
-              <a:t>CLMS · 24CSI015 · Software Engineering with Agile Practices</a:t>
+              <a:t>KCT Library · 24CSI015 · Software Engineering with Agile Practices</a:t>
             </a:r>
           </a:p>
         </p:txBody>
@@ -7681,7 +7681,7 @@
                 <a:latin typeface="Helvetica"/>
                 <a:ea typeface="Helvetica"/>
               </a:rPr>
-              <a:t>CLMS · 24CSI015 · Software Engineering with Agile Practices</a:t>
+              <a:t>KCT Library · 24CSI015 · Software Engineering with Agile Practices</a:t>
             </a:r>
           </a:p>
         </p:txBody>
@@ -9412,7 +9412,7 @@
                 <a:latin typeface="Helvetica"/>
                 <a:ea typeface="Helvetica"/>
               </a:rPr>
-              <a:t>CLMS · 24CSI015 · Software Engineering with Agile Practices</a:t>
+              <a:t>KCT Library · 24CSI015 · Software Engineering with Agile Practices</a:t>
             </a:r>
           </a:p>
         </p:txBody>
@@ -10899,7 +10899,7 @@
                 <a:latin typeface="Helvetica"/>
                 <a:ea typeface="Helvetica"/>
               </a:rPr>
-              <a:t>CLMS · 24CSI015 · Software Engineering with Agile Practices</a:t>
+              <a:t>KCT Library · 24CSI015 · Software Engineering with Agile Practices</a:t>
             </a:r>
           </a:p>
         </p:txBody>
@@ -12060,7 +12060,7 @@
                 <a:latin typeface="Helvetica"/>
                 <a:ea typeface="Helvetica"/>
               </a:rPr>
-              <a:t>CLMS · 24CSI015 · Software Engineering with Agile Practices</a:t>
+              <a:t>KCT Library · 24CSI015 · Software Engineering with Agile Practices</a:t>
             </a:r>
           </a:p>
         </p:txBody>
@@ -12941,7 +12941,7 @@
                 <a:latin typeface="Helvetica"/>
                 <a:ea typeface="Helvetica"/>
               </a:rPr>
-              <a:t>CLMS · 24CSI015 · Software Engineering with Agile Practices</a:t>
+              <a:t>KCT Library · 24CSI015 · Software Engineering with Agile Practices</a:t>
             </a:r>
           </a:p>
         </p:txBody>
@@ -13912,7 +13912,7 @@
                 <a:latin typeface="Helvetica"/>
                 <a:ea typeface="Helvetica"/>
               </a:rPr>
-              <a:t>CLMS · 24CSI015 · Software Engineering with Agile Practices</a:t>
+              <a:t>KCT Library · 24CSI015 · Software Engineering with Agile Practices</a:t>
             </a:r>
           </a:p>
         </p:txBody>
@@ -14777,7 +14777,7 @@
                 <a:latin typeface="Helvetica"/>
                 <a:ea typeface="Helvetica"/>
               </a:rPr>
-              <a:t>CLMS · 24CSI015 · Software Engineering with Agile Practices</a:t>
+              <a:t>KCT Library · 24CSI015 · Software Engineering with Agile Practices</a:t>
             </a:r>
           </a:p>
         </p:txBody>
@@ -16188,7 +16188,7 @@
                 <a:latin typeface="Helvetica"/>
                 <a:ea typeface="Helvetica"/>
               </a:rPr>
-              <a:t>CLMS · 24CSI015 · Software Engineering with Agile Practices</a:t>
+              <a:t>KCT Library · 24CSI015 · Software Engineering with Agile Practices</a:t>
             </a:r>
           </a:p>
         </p:txBody>
@@ -17256,7 +17256,7 @@
                 <a:latin typeface="Helvetica"/>
                 <a:ea typeface="Helvetica"/>
               </a:rPr>
-              <a:t>CLMS · 24CSI015 · Software Engineering with Agile Practices</a:t>
+              <a:t>KCT Library · 24CSI015 · Software Engineering with Agile Practices</a:t>
             </a:r>
           </a:p>
         </p:txBody>
@@ -18597,7 +18597,7 @@
                 <a:latin typeface="Helvetica"/>
                 <a:ea typeface="Helvetica"/>
               </a:rPr>
-              <a:t>CLMS · 24CSI015 · Software Engineering with Agile Practices</a:t>
+              <a:t>KCT Library · 24CSI015 · Software Engineering with Agile Practices</a:t>
             </a:r>
           </a:p>
         </p:txBody>
@@ -20174,7 +20174,7 @@
                 <a:latin typeface="Helvetica"/>
                 <a:ea typeface="Helvetica"/>
               </a:rPr>
-              <a:t>CLMS · 24CSI015 · Software Engineering with Agile Practices</a:t>
+              <a:t>KCT Library · 24CSI015 · Software Engineering with Agile Practices</a:t>
             </a:r>
           </a:p>
         </p:txBody>
@@ -21850,7 +21850,7 @@
                 <a:latin typeface="Helvetica"/>
                 <a:ea typeface="Helvetica"/>
               </a:rPr>
-              <a:t>CLMS · 24CSI015 · Software Engineering with Agile Practices</a:t>
+              <a:t>KCT Library · 24CSI015 · Software Engineering with Agile Practices</a:t>
             </a:r>
           </a:p>
         </p:txBody>
@@ -23726,7 +23726,7 @@
                 <a:latin typeface="Helvetica"/>
                 <a:ea typeface="Helvetica"/>
               </a:rPr>
-              <a:t>CLMS · 24CSI015 · Software Engineering with Agile Practices</a:t>
+              <a:t>KCT Library · 24CSI015 · Software Engineering with Agile Practices</a:t>
             </a:r>
           </a:p>
         </p:txBody>

--- a/presentation/unit-3/CLMS-Unit-3-Testing-Quality-and-DevOps.pptx
+++ b/presentation/unit-3/CLMS-Unit-3-Testing-Quality-and-DevOps.pptx
@@ -3306,7 +3306,7 @@
                 <a:latin typeface="Helvetica"/>
                 <a:ea typeface="Helvetica"/>
               </a:rPr>
-              <a:t>COURSE 24CSI015 · SOFTWARE ENGINEERING WITH AGILE PRACTICES</a:t>
+              <a:t>KCT LIBRARY — SYSTEM DOCUMENTATION</a:t>
             </a:r>
           </a:p>
         </p:txBody>
@@ -3636,7 +3636,7 @@
                 <a:latin typeface="Helvetica"/>
                 <a:ea typeface="Helvetica"/>
               </a:rPr>
-              <a:t>S. Nidhish Guhan S</a:t>
+              <a:t>Library Administration</a:t>
             </a:r>
           </a:p>
         </p:txBody>
@@ -3676,7 +3676,7 @@
                 <a:latin typeface="Helvetica"/>
                 <a:ea typeface="Helvetica"/>
               </a:rPr>
-              <a:t>— Product Owner / Developer</a:t>
+              <a:t>— Product Owner</a:t>
             </a:r>
           </a:p>
         </p:txBody>
@@ -3716,7 +3716,7 @@
                 <a:latin typeface="Helvetica"/>
                 <a:ea typeface="Helvetica"/>
               </a:rPr>
-              <a:t>Kawaskar J</a:t>
+              <a:t>Library IT</a:t>
             </a:r>
           </a:p>
         </p:txBody>
@@ -3756,7 +3756,7 @@
                 <a:latin typeface="Helvetica"/>
                 <a:ea typeface="Helvetica"/>
               </a:rPr>
-              <a:t>— Scrum Master / Developer</a:t>
+              <a:t>— System Administration</a:t>
             </a:r>
           </a:p>
         </p:txBody>
@@ -3796,7 +3796,7 @@
                 <a:latin typeface="Menlo"/>
                 <a:ea typeface="Menlo"/>
               </a:rPr>
-              <a:t>Project seminar · September 2026</a:t>
+              <a:t>KCT Library · System documentation</a:t>
             </a:r>
           </a:p>
         </p:txBody>
@@ -5652,7 +5652,7 @@
                 <a:latin typeface="Helvetica"/>
                 <a:ea typeface="Helvetica"/>
               </a:rPr>
-              <a:t>KCT Library · 24CSI015 · Software Engineering with Agile Practices</a:t>
+              <a:t>KCT Library</a:t>
             </a:r>
           </a:p>
         </p:txBody>
@@ -6693,7 +6693,7 @@
                 <a:latin typeface="Helvetica"/>
                 <a:ea typeface="Helvetica"/>
               </a:rPr>
-              <a:t>KCT Library · 24CSI015 · Software Engineering with Agile Practices</a:t>
+              <a:t>KCT Library</a:t>
             </a:r>
           </a:p>
         </p:txBody>
@@ -7681,7 +7681,7 @@
                 <a:latin typeface="Helvetica"/>
                 <a:ea typeface="Helvetica"/>
               </a:rPr>
-              <a:t>KCT Library · 24CSI015 · Software Engineering with Agile Practices</a:t>
+              <a:t>KCT Library</a:t>
             </a:r>
           </a:p>
         </p:txBody>
@@ -9412,7 +9412,7 @@
                 <a:latin typeface="Helvetica"/>
                 <a:ea typeface="Helvetica"/>
               </a:rPr>
-              <a:t>KCT Library · 24CSI015 · Software Engineering with Agile Practices</a:t>
+              <a:t>KCT Library</a:t>
             </a:r>
           </a:p>
         </p:txBody>
@@ -10899,7 +10899,7 @@
                 <a:latin typeface="Helvetica"/>
                 <a:ea typeface="Helvetica"/>
               </a:rPr>
-              <a:t>KCT Library · 24CSI015 · Software Engineering with Agile Practices</a:t>
+              <a:t>KCT Library</a:t>
             </a:r>
           </a:p>
         </p:txBody>
@@ -12060,7 +12060,7 @@
                 <a:latin typeface="Helvetica"/>
                 <a:ea typeface="Helvetica"/>
               </a:rPr>
-              <a:t>KCT Library · 24CSI015 · Software Engineering with Agile Practices</a:t>
+              <a:t>KCT Library</a:t>
             </a:r>
           </a:p>
         </p:txBody>
@@ -12856,7 +12856,7 @@
                 <a:latin typeface="Menlo"/>
                 <a:ea typeface="Menlo"/>
               </a:rPr>
-              <a:t>S. Nidhish Guhan S · Kawaskar J — 24CSI015 Software Engineering with Agile Practices</a:t>
+              <a:t>KCT Library — System Documentation</a:t>
             </a:r>
           </a:p>
         </p:txBody>
@@ -12941,7 +12941,7 @@
                 <a:latin typeface="Helvetica"/>
                 <a:ea typeface="Helvetica"/>
               </a:rPr>
-              <a:t>KCT Library · 24CSI015 · Software Engineering with Agile Practices</a:t>
+              <a:t>KCT Library</a:t>
             </a:r>
           </a:p>
         </p:txBody>
@@ -13912,7 +13912,7 @@
                 <a:latin typeface="Helvetica"/>
                 <a:ea typeface="Helvetica"/>
               </a:rPr>
-              <a:t>KCT Library · 24CSI015 · Software Engineering with Agile Practices</a:t>
+              <a:t>KCT Library</a:t>
             </a:r>
           </a:p>
         </p:txBody>
@@ -14777,7 +14777,7 @@
                 <a:latin typeface="Helvetica"/>
                 <a:ea typeface="Helvetica"/>
               </a:rPr>
-              <a:t>KCT Library · 24CSI015 · Software Engineering with Agile Practices</a:t>
+              <a:t>KCT Library</a:t>
             </a:r>
           </a:p>
         </p:txBody>
@@ -16188,7 +16188,7 @@
                 <a:latin typeface="Helvetica"/>
                 <a:ea typeface="Helvetica"/>
               </a:rPr>
-              <a:t>KCT Library · 24CSI015 · Software Engineering with Agile Practices</a:t>
+              <a:t>KCT Library</a:t>
             </a:r>
           </a:p>
         </p:txBody>
@@ -17256,7 +17256,7 @@
                 <a:latin typeface="Helvetica"/>
                 <a:ea typeface="Helvetica"/>
               </a:rPr>
-              <a:t>KCT Library · 24CSI015 · Software Engineering with Agile Practices</a:t>
+              <a:t>KCT Library</a:t>
             </a:r>
           </a:p>
         </p:txBody>
@@ -18597,7 +18597,7 @@
                 <a:latin typeface="Helvetica"/>
                 <a:ea typeface="Helvetica"/>
               </a:rPr>
-              <a:t>KCT Library · 24CSI015 · Software Engineering with Agile Practices</a:t>
+              <a:t>KCT Library</a:t>
             </a:r>
           </a:p>
         </p:txBody>
@@ -20174,7 +20174,7 @@
                 <a:latin typeface="Helvetica"/>
                 <a:ea typeface="Helvetica"/>
               </a:rPr>
-              <a:t>KCT Library · 24CSI015 · Software Engineering with Agile Practices</a:t>
+              <a:t>KCT Library</a:t>
             </a:r>
           </a:p>
         </p:txBody>
@@ -21850,7 +21850,7 @@
                 <a:latin typeface="Helvetica"/>
                 <a:ea typeface="Helvetica"/>
               </a:rPr>
-              <a:t>KCT Library · 24CSI015 · Software Engineering with Agile Practices</a:t>
+              <a:t>KCT Library</a:t>
             </a:r>
           </a:p>
         </p:txBody>
@@ -23726,7 +23726,7 @@
                 <a:latin typeface="Helvetica"/>
                 <a:ea typeface="Helvetica"/>
               </a:rPr>
-              <a:t>KCT Library · 24CSI015 · Software Engineering with Agile Practices</a:t>
+              <a:t>KCT Library</a:t>
             </a:r>
           </a:p>
         </p:txBody>
